--- a/final_presentation.pptx
+++ b/final_presentation.pptx
@@ -215,7 +215,7 @@
           <a:p>
             <a:fld id="{D9BEA8BE-BAB1-4496-9589-320BA365F656}" type="datetimeFigureOut">
               <a:rPr lang="en-US" smtClean="0"/>
-              <a:t>2/17/2026</a:t>
+              <a:t>2/19/2026</a:t>
             </a:fld>
             <a:endParaRPr lang="en-US"/>
           </a:p>
@@ -713,7 +713,7 @@
           <a:p>
             <a:fld id="{03531942-572B-468B-8583-3B9684FFECA3}" type="datetimeFigureOut">
               <a:rPr lang="en-US" smtClean="0"/>
-              <a:t>2/17/2026</a:t>
+              <a:t>2/19/2026</a:t>
             </a:fld>
             <a:endParaRPr lang="en-US"/>
           </a:p>
@@ -911,7 +911,7 @@
           <a:p>
             <a:fld id="{03531942-572B-468B-8583-3B9684FFECA3}" type="datetimeFigureOut">
               <a:rPr lang="en-US" smtClean="0"/>
-              <a:t>2/17/2026</a:t>
+              <a:t>2/19/2026</a:t>
             </a:fld>
             <a:endParaRPr lang="en-US"/>
           </a:p>
@@ -1119,7 +1119,7 @@
           <a:p>
             <a:fld id="{03531942-572B-468B-8583-3B9684FFECA3}" type="datetimeFigureOut">
               <a:rPr lang="en-US" smtClean="0"/>
-              <a:t>2/17/2026</a:t>
+              <a:t>2/19/2026</a:t>
             </a:fld>
             <a:endParaRPr lang="en-US"/>
           </a:p>
@@ -1317,7 +1317,7 @@
           <a:p>
             <a:fld id="{03531942-572B-468B-8583-3B9684FFECA3}" type="datetimeFigureOut">
               <a:rPr lang="en-US" smtClean="0"/>
-              <a:t>2/17/2026</a:t>
+              <a:t>2/19/2026</a:t>
             </a:fld>
             <a:endParaRPr lang="en-US"/>
           </a:p>
@@ -1592,7 +1592,7 @@
           <a:p>
             <a:fld id="{03531942-572B-468B-8583-3B9684FFECA3}" type="datetimeFigureOut">
               <a:rPr lang="en-US" smtClean="0"/>
-              <a:t>2/17/2026</a:t>
+              <a:t>2/19/2026</a:t>
             </a:fld>
             <a:endParaRPr lang="en-US"/>
           </a:p>
@@ -1857,7 +1857,7 @@
           <a:p>
             <a:fld id="{03531942-572B-468B-8583-3B9684FFECA3}" type="datetimeFigureOut">
               <a:rPr lang="en-US" smtClean="0"/>
-              <a:t>2/17/2026</a:t>
+              <a:t>2/19/2026</a:t>
             </a:fld>
             <a:endParaRPr lang="en-US"/>
           </a:p>
@@ -2269,7 +2269,7 @@
           <a:p>
             <a:fld id="{03531942-572B-468B-8583-3B9684FFECA3}" type="datetimeFigureOut">
               <a:rPr lang="en-US" smtClean="0"/>
-              <a:t>2/17/2026</a:t>
+              <a:t>2/19/2026</a:t>
             </a:fld>
             <a:endParaRPr lang="en-US"/>
           </a:p>
@@ -2410,7 +2410,7 @@
           <a:p>
             <a:fld id="{03531942-572B-468B-8583-3B9684FFECA3}" type="datetimeFigureOut">
               <a:rPr lang="en-US" smtClean="0"/>
-              <a:t>2/17/2026</a:t>
+              <a:t>2/19/2026</a:t>
             </a:fld>
             <a:endParaRPr lang="en-US"/>
           </a:p>
@@ -2523,7 +2523,7 @@
           <a:p>
             <a:fld id="{03531942-572B-468B-8583-3B9684FFECA3}" type="datetimeFigureOut">
               <a:rPr lang="en-US" smtClean="0"/>
-              <a:t>2/17/2026</a:t>
+              <a:t>2/19/2026</a:t>
             </a:fld>
             <a:endParaRPr lang="en-US"/>
           </a:p>
@@ -2834,7 +2834,7 @@
           <a:p>
             <a:fld id="{03531942-572B-468B-8583-3B9684FFECA3}" type="datetimeFigureOut">
               <a:rPr lang="en-US" smtClean="0"/>
-              <a:t>2/17/2026</a:t>
+              <a:t>2/19/2026</a:t>
             </a:fld>
             <a:endParaRPr lang="en-US"/>
           </a:p>
@@ -3122,7 +3122,7 @@
           <a:p>
             <a:fld id="{03531942-572B-468B-8583-3B9684FFECA3}" type="datetimeFigureOut">
               <a:rPr lang="en-US" smtClean="0"/>
-              <a:t>2/17/2026</a:t>
+              <a:t>2/19/2026</a:t>
             </a:fld>
             <a:endParaRPr lang="en-US"/>
           </a:p>
@@ -3363,7 +3363,7 @@
           <a:p>
             <a:fld id="{03531942-572B-468B-8583-3B9684FFECA3}" type="datetimeFigureOut">
               <a:rPr lang="en-US" smtClean="0"/>
-              <a:t>2/17/2026</a:t>
+              <a:t>2/19/2026</a:t>
             </a:fld>
             <a:endParaRPr lang="en-US"/>
           </a:p>
@@ -5395,7 +5395,7 @@
               <a:buChar char="•"/>
             </a:pPr>
             <a:r>
-              <a:rPr kumimoji="0" lang="en-US" altLang="en-US" sz="1000" b="1" i="0" u="none" strike="noStrike" cap="none" normalizeH="0" baseline="0">
+              <a:rPr kumimoji="0" lang="en-US" altLang="en-US" sz="1000" b="1" i="0" u="none" strike="noStrike" cap="none" normalizeH="0" baseline="0" dirty="0">
                 <a:ln>
                   <a:noFill/>
                 </a:ln>
@@ -5405,7 +5405,7 @@
               <a:t>Result:</a:t>
             </a:r>
             <a:r>
-              <a:rPr kumimoji="0" lang="en-US" altLang="en-US" sz="1000" b="0" i="0" u="none" strike="noStrike" cap="none" normalizeH="0" baseline="0">
+              <a:rPr kumimoji="0" lang="en-US" altLang="en-US" sz="1000" b="0" i="0" u="none" strike="noStrike" cap="none" normalizeH="0" baseline="0" dirty="0">
                 <a:ln>
                   <a:noFill/>
                 </a:ln>
@@ -5415,7 +5415,7 @@
               <a:t> Achieved </a:t>
             </a:r>
             <a:r>
-              <a:rPr kumimoji="0" lang="en-US" altLang="en-US" sz="1000" b="1" i="0" u="none" strike="noStrike" cap="none" normalizeH="0" baseline="0">
+              <a:rPr kumimoji="0" lang="en-US" altLang="en-US" sz="1000" b="1" i="0" u="none" strike="noStrike" cap="none" normalizeH="0" baseline="0" dirty="0">
                 <a:ln>
                   <a:noFill/>
                 </a:ln>
@@ -5425,7 +5425,7 @@
               <a:t>~95.3% Peak Accuracy</a:t>
             </a:r>
             <a:r>
-              <a:rPr kumimoji="0" lang="en-US" altLang="en-US" sz="1000" b="0" i="0" u="none" strike="noStrike" cap="none" normalizeH="0" baseline="0">
+              <a:rPr kumimoji="0" lang="en-US" altLang="en-US" sz="1000" b="0" i="0" u="none" strike="noStrike" cap="none" normalizeH="0" baseline="0" dirty="0">
                 <a:ln>
                   <a:noFill/>
                 </a:ln>
@@ -5447,7 +5447,7 @@
               <a:buChar char="•"/>
             </a:pPr>
             <a:r>
-              <a:rPr kumimoji="0" lang="en-US" altLang="en-US" sz="1000" b="1" i="0" u="none" strike="noStrike" cap="none" normalizeH="0" baseline="0">
+              <a:rPr kumimoji="0" lang="en-US" altLang="en-US" sz="1000" b="1" i="0" u="none" strike="noStrike" cap="none" normalizeH="0" baseline="0" dirty="0">
                 <a:ln>
                   <a:noFill/>
                 </a:ln>
@@ -5457,7 +5457,7 @@
               <a:t>The Fix:</a:t>
             </a:r>
             <a:r>
-              <a:rPr kumimoji="0" lang="en-US" altLang="en-US" sz="1000" b="0" i="0" u="none" strike="noStrike" cap="none" normalizeH="0" baseline="0">
+              <a:rPr kumimoji="0" lang="en-US" altLang="en-US" sz="1000" b="0" i="0" u="none" strike="noStrike" cap="none" normalizeH="0" baseline="0" dirty="0">
                 <a:ln>
                   <a:noFill/>
                 </a:ln>
@@ -5479,7 +5479,7 @@
               <a:buChar char="•"/>
             </a:pPr>
             <a:r>
-              <a:rPr kumimoji="0" lang="en-US" altLang="en-US" sz="1000" b="1" i="0" u="none" strike="noStrike" cap="none" normalizeH="0" baseline="0">
+              <a:rPr kumimoji="0" lang="en-US" altLang="en-US" sz="1000" b="1" i="0" u="none" strike="noStrike" cap="none" normalizeH="0" baseline="0" dirty="0">
                 <a:ln>
                   <a:noFill/>
                 </a:ln>
@@ -5489,14 +5489,14 @@
               <a:t>Observation:</a:t>
             </a:r>
             <a:r>
-              <a:rPr kumimoji="0" lang="en-US" altLang="en-US" sz="1000" b="0" i="0" u="none" strike="noStrike" cap="none" normalizeH="0" baseline="0">
+              <a:rPr kumimoji="0" lang="en-US" altLang="en-US" sz="1000" b="0" i="0" u="none" strike="noStrike" cap="none" normalizeH="0" baseline="0" dirty="0">
                 <a:ln>
                   <a:noFill/>
                 </a:ln>
                 <a:effectLst/>
                 <a:latin typeface="Arial" panose="020B0604020202020204" pitchFamily="34" charset="0"/>
               </a:rPr>
-              <a:t> Excellent generalization. The model performed almost as well on unseen data as it did on training data (Train 94% vs Val 95%).</a:t>
+              <a:t> Excellent generalization. The model performed almost as well on unseen data as it did on training data (Train 96% vs Val 95%).</a:t>
             </a:r>
           </a:p>
           <a:p>
@@ -5511,7 +5511,7 @@
               <a:buChar char="•"/>
             </a:pPr>
             <a:r>
-              <a:rPr kumimoji="0" lang="en-US" altLang="en-US" sz="1000" b="1" i="0" u="none" strike="noStrike" cap="none" normalizeH="0" baseline="0">
+              <a:rPr kumimoji="0" lang="en-US" altLang="en-US" sz="1000" b="1" i="0" u="none" strike="noStrike" cap="none" normalizeH="0" baseline="0" dirty="0">
                 <a:ln>
                   <a:noFill/>
                 </a:ln>
@@ -5521,7 +5521,7 @@
               <a:t>The "Hiccup":</a:t>
             </a:r>
             <a:r>
-              <a:rPr kumimoji="0" lang="en-US" altLang="en-US" sz="1000" b="0" i="0" u="none" strike="noStrike" cap="none" normalizeH="0" baseline="0">
+              <a:rPr kumimoji="0" lang="en-US" altLang="en-US" sz="1000" b="0" i="0" u="none" strike="noStrike" cap="none" normalizeH="0" baseline="0" dirty="0">
                 <a:ln>
                   <a:noFill/>
                 </a:ln>
@@ -5533,36 +5533,6 @@
           </a:p>
         </p:txBody>
       </p:sp>
-      <p:pic>
-        <p:nvPicPr>
-          <p:cNvPr id="6" name="Picture 5">
-            <a:extLst>
-              <a:ext uri="{FF2B5EF4-FFF2-40B4-BE49-F238E27FC236}">
-                <a16:creationId xmlns:a16="http://schemas.microsoft.com/office/drawing/2014/main" id="{42F47EEF-3048-2054-0BC3-A05FCC9D9F0C}"/>
-              </a:ext>
-            </a:extLst>
-          </p:cNvPr>
-          <p:cNvPicPr>
-            <a:picLocks noChangeAspect="1"/>
-          </p:cNvPicPr>
-          <p:nvPr/>
-        </p:nvPicPr>
-        <p:blipFill>
-          <a:blip r:embed="rId2"/>
-          <a:stretch>
-            <a:fillRect/>
-          </a:stretch>
-        </p:blipFill>
-        <p:spPr>
-          <a:xfrm>
-            <a:off x="630936" y="2527852"/>
-            <a:ext cx="10917936" cy="3521032"/>
-          </a:xfrm>
-          <a:prstGeom prst="rect">
-            <a:avLst/>
-          </a:prstGeom>
-        </p:spPr>
-      </p:pic>
       <p:sp>
         <p:nvSpPr>
           <p:cNvPr id="3" name="Subtitle 2">
@@ -5765,6 +5735,36 @@
           </a:p>
         </p:txBody>
       </p:sp>
+      <p:pic>
+        <p:nvPicPr>
+          <p:cNvPr id="7" name="Picture 6">
+            <a:extLst>
+              <a:ext uri="{FF2B5EF4-FFF2-40B4-BE49-F238E27FC236}">
+                <a16:creationId xmlns:a16="http://schemas.microsoft.com/office/drawing/2014/main" id="{0C98716A-A66C-035B-799F-52B13D9FA5EC}"/>
+              </a:ext>
+            </a:extLst>
+          </p:cNvPr>
+          <p:cNvPicPr>
+            <a:picLocks noChangeAspect="1"/>
+          </p:cNvPicPr>
+          <p:nvPr/>
+        </p:nvPicPr>
+        <p:blipFill>
+          <a:blip r:embed="rId2"/>
+          <a:stretch>
+            <a:fillRect/>
+          </a:stretch>
+        </p:blipFill>
+        <p:spPr>
+          <a:xfrm>
+            <a:off x="246833" y="2247577"/>
+            <a:ext cx="11698333" cy="4001058"/>
+          </a:xfrm>
+          <a:prstGeom prst="rect">
+            <a:avLst/>
+          </a:prstGeom>
+        </p:spPr>
+      </p:pic>
     </p:spTree>
     <p:extLst>
       <p:ext uri="{BB962C8B-B14F-4D97-AF65-F5344CB8AC3E}">
@@ -6173,27 +6173,11 @@
                 <a:effectLst/>
                 <a:latin typeface="Arial" panose="020B0604020202020204" pitchFamily="34" charset="0"/>
               </a:rPr>
-              <a:t>Result:</a:t>
-            </a:r>
-            <a:r>
-              <a:rPr kumimoji="0" lang="en-US" altLang="en-US" sz="1000" b="0" i="0" u="none" strike="noStrike" cap="none" normalizeH="0" baseline="0" dirty="0">
-                <a:ln>
-                  <a:noFill/>
-                </a:ln>
-                <a:effectLst/>
-                <a:latin typeface="Arial" panose="020B0604020202020204" pitchFamily="34" charset="0"/>
-              </a:rPr>
-              <a:t> Achieved </a:t>
-            </a:r>
-            <a:r>
-              <a:rPr kumimoji="0" lang="en-US" altLang="en-US" sz="1000" b="1" i="0" u="none" strike="noStrike" cap="none" normalizeH="0" baseline="0" dirty="0">
-                <a:ln>
-                  <a:noFill/>
-                </a:ln>
-                <a:effectLst/>
-                <a:latin typeface="Arial" panose="020B0604020202020204" pitchFamily="34" charset="0"/>
-              </a:rPr>
-              <a:t>~89.1% Peak Accuracy</a:t>
+              <a:t>Result: </a:t>
+            </a:r>
+            <a:r>
+              <a:rPr lang="en-US" sz="1000" dirty="0"/>
+              <a:t>Achieved ~79.7% Peak Accuracy</a:t>
             </a:r>
             <a:r>
               <a:rPr kumimoji="0" lang="en-US" altLang="en-US" sz="1000" b="0" i="0" u="none" strike="noStrike" cap="none" normalizeH="0" baseline="0" dirty="0">
@@ -6316,7 +6300,7 @@
                 <a:effectLst/>
                 <a:latin typeface="Arial" panose="020B0604020202020204" pitchFamily="34" charset="0"/>
               </a:rPr>
-              <a:t> ~89% Acc (Moderate Generalization)</a:t>
+              <a:t> ~80% Acc (Moderate Generalization)</a:t>
             </a:r>
           </a:p>
           <a:p>
@@ -6387,10 +6371,10 @@
       </p:sp>
       <p:pic>
         <p:nvPicPr>
-          <p:cNvPr id="6" name="Picture 5">
+          <p:cNvPr id="3" name="Picture 2">
             <a:extLst>
               <a:ext uri="{FF2B5EF4-FFF2-40B4-BE49-F238E27FC236}">
-                <a16:creationId xmlns:a16="http://schemas.microsoft.com/office/drawing/2014/main" id="{C18D511A-2DF2-E644-0E66-9BB61F958D54}"/>
+                <a16:creationId xmlns:a16="http://schemas.microsoft.com/office/drawing/2014/main" id="{8A9F14A1-724C-E4DA-239C-B4B9D81A8184}"/>
               </a:ext>
             </a:extLst>
           </p:cNvPr>
@@ -6407,8 +6391,8 @@
         </p:blipFill>
         <p:spPr>
           <a:xfrm>
-            <a:off x="630936" y="2523743"/>
-            <a:ext cx="10917936" cy="3493738"/>
+            <a:off x="554947" y="2585683"/>
+            <a:ext cx="10861199" cy="3652594"/>
           </a:xfrm>
           <a:prstGeom prst="rect">
             <a:avLst/>
@@ -6917,10 +6901,10 @@
       </p:sp>
       <p:pic>
         <p:nvPicPr>
-          <p:cNvPr id="3" name="Picture 2">
+          <p:cNvPr id="6" name="Picture 5">
             <a:extLst>
               <a:ext uri="{FF2B5EF4-FFF2-40B4-BE49-F238E27FC236}">
-                <a16:creationId xmlns:a16="http://schemas.microsoft.com/office/drawing/2014/main" id="{835A910C-72FB-2D5F-A7AD-D0AF44EDF9AC}"/>
+                <a16:creationId xmlns:a16="http://schemas.microsoft.com/office/drawing/2014/main" id="{6D0304F5-A190-B396-3174-9543F3191912}"/>
               </a:ext>
             </a:extLst>
           </p:cNvPr>
@@ -6937,8 +6921,8 @@
         </p:blipFill>
         <p:spPr>
           <a:xfrm>
-            <a:off x="790572" y="2330662"/>
-            <a:ext cx="10610855" cy="3385564"/>
+            <a:off x="397349" y="2514600"/>
+            <a:ext cx="10806361" cy="3648562"/>
           </a:xfrm>
           <a:prstGeom prst="rect">
             <a:avLst/>
@@ -11774,48 +11758,6 @@
           <a:p>
             <a:r>
               <a:rPr lang="en-US" sz="2000" b="1" dirty="0"/>
-              <a:t>Data Augmentation:</a:t>
-            </a:r>
-            <a:endParaRPr lang="en-US" sz="2000" dirty="0"/>
-          </a:p>
-          <a:p>
-            <a:pPr lvl="1"/>
-            <a:r>
-              <a:rPr lang="en-US" sz="2000" b="1" dirty="0"/>
-              <a:t>Plan:</a:t>
-            </a:r>
-            <a:r>
-              <a:rPr lang="en-US" sz="2000" dirty="0"/>
-              <a:t> We used raw images. If we had more time, we would implement </a:t>
-            </a:r>
-            <a:r>
-              <a:rPr lang="en-US" sz="2000" b="1" dirty="0"/>
-              <a:t>Random Rotations, Flips, and Zooms</a:t>
-            </a:r>
-            <a:r>
-              <a:rPr lang="en-US" sz="2000" dirty="0"/>
-              <a:t>. This would artificially multiply our dataset size and likely help the custom </a:t>
-            </a:r>
-            <a:r>
-              <a:rPr lang="en-US" sz="2000" dirty="0" err="1"/>
-              <a:t>DeepCNN</a:t>
-            </a:r>
-            <a:r>
-              <a:rPr lang="en-US" sz="2000" dirty="0"/>
-              <a:t> close the gap with </a:t>
-            </a:r>
-            <a:r>
-              <a:rPr lang="en-US" sz="2000" dirty="0" err="1"/>
-              <a:t>ResNet</a:t>
-            </a:r>
-            <a:r>
-              <a:rPr lang="en-US" sz="2000" dirty="0"/>
-              <a:t>.</a:t>
-            </a:r>
-          </a:p>
-          <a:p>
-            <a:r>
-              <a:rPr lang="en-US" sz="2000" b="1" dirty="0"/>
               <a:t>Hyperparameter Tuning:</a:t>
             </a:r>
             <a:endParaRPr lang="en-US" sz="2000" dirty="0"/>
@@ -12559,10 +12501,10 @@
       </p:sp>
       <p:pic>
         <p:nvPicPr>
-          <p:cNvPr id="14" name="Picture 13">
+          <p:cNvPr id="3" name="Picture 2">
             <a:extLst>
               <a:ext uri="{FF2B5EF4-FFF2-40B4-BE49-F238E27FC236}">
-                <a16:creationId xmlns:a16="http://schemas.microsoft.com/office/drawing/2014/main" id="{E4719134-AF3D-6C5E-C850-BC7939243A23}"/>
+                <a16:creationId xmlns:a16="http://schemas.microsoft.com/office/drawing/2014/main" id="{EB8A5D4C-4D1B-3B1D-E468-0BAF32BCFF48}"/>
               </a:ext>
             </a:extLst>
           </p:cNvPr>
@@ -12579,8 +12521,8 @@
         </p:blipFill>
         <p:spPr>
           <a:xfrm>
-            <a:off x="630936" y="2455505"/>
-            <a:ext cx="10917936" cy="3630214"/>
+            <a:off x="630936" y="2468880"/>
+            <a:ext cx="10796123" cy="3540145"/>
           </a:xfrm>
           <a:prstGeom prst="rect">
             <a:avLst/>
@@ -13006,7 +12948,7 @@
                 <a:latin typeface="Arial" panose="020B0604020202020204" pitchFamily="34" charset="0"/>
                 <a:cs typeface="Arial" panose="020B0604020202020204" pitchFamily="34" charset="0"/>
               </a:rPr>
-              <a:t>~82.8% Peak Validation Accuracy</a:t>
+              <a:t>~87.5% Peak Validation Accuracy</a:t>
             </a:r>
             <a:r>
               <a:rPr lang="en-US" altLang="en-US" sz="1400" dirty="0">
@@ -13134,10 +13076,10 @@
       </p:sp>
       <p:pic>
         <p:nvPicPr>
-          <p:cNvPr id="7" name="Picture 6">
+          <p:cNvPr id="3" name="Picture 2">
             <a:extLst>
               <a:ext uri="{FF2B5EF4-FFF2-40B4-BE49-F238E27FC236}">
-                <a16:creationId xmlns:a16="http://schemas.microsoft.com/office/drawing/2014/main" id="{97B0EADE-6A29-33B6-C01E-2D00FD24706D}"/>
+                <a16:creationId xmlns:a16="http://schemas.microsoft.com/office/drawing/2014/main" id="{586307E2-50C4-50F7-250C-400057325318}"/>
               </a:ext>
             </a:extLst>
           </p:cNvPr>
@@ -13148,15 +13090,14 @@
         </p:nvPicPr>
         <p:blipFill>
           <a:blip r:embed="rId2"/>
-          <a:srcRect r="1161" b="1"/>
           <a:stretch>
             <a:fillRect/>
           </a:stretch>
         </p:blipFill>
         <p:spPr>
           <a:xfrm>
-            <a:off x="630936" y="3083247"/>
-            <a:ext cx="10917936" cy="3617587"/>
+            <a:off x="903697" y="2991204"/>
+            <a:ext cx="10384605" cy="3478177"/>
           </a:xfrm>
           <a:prstGeom prst="rect">
             <a:avLst/>
@@ -13598,7 +13539,7 @@
               <a:rPr lang="en-US" altLang="en-US" sz="1000" dirty="0">
                 <a:latin typeface="Arial" panose="020B0604020202020204" pitchFamily="34" charset="0"/>
               </a:rPr>
-              <a:t>, but required the full 10 epochs to get there.</a:t>
+              <a:t>, but required the full 9 epochs to get there.</a:t>
             </a:r>
           </a:p>
           <a:p>
@@ -13622,19 +13563,7 @@
               <a:rPr lang="en-US" altLang="en-US" sz="1000" dirty="0">
                 <a:latin typeface="Arial" panose="020B0604020202020204" pitchFamily="34" charset="0"/>
               </a:rPr>
-              <a:t> Experienced a </a:t>
-            </a:r>
-            <a:r>
-              <a:rPr lang="en-US" altLang="en-US" sz="1000" b="1" dirty="0">
-                <a:latin typeface="Arial" panose="020B0604020202020204" pitchFamily="34" charset="0"/>
-              </a:rPr>
-              <a:t>"Cold Start"</a:t>
-            </a:r>
-            <a:r>
-              <a:rPr lang="en-US" altLang="en-US" sz="1000" dirty="0">
-                <a:latin typeface="Arial" panose="020B0604020202020204" pitchFamily="34" charset="0"/>
-              </a:rPr>
-              <a:t>: The model failed to learn anything for the first 4 epochs (accuracy stuck at 33% random guess).</a:t>
+              <a:t> Although high validation accuracy is occasionally reached, it is not maintained consistently.</a:t>
             </a:r>
           </a:p>
           <a:p>
@@ -13658,7 +13587,7 @@
               <a:rPr lang="en-US" altLang="en-US" sz="1000" dirty="0">
                 <a:latin typeface="Arial" panose="020B0604020202020204" pitchFamily="34" charset="0"/>
               </a:rPr>
-              <a:t> Unlike Adam (which converged in 2 epochs), SGD struggled to navigate the initial loss landscape, wasting 40% of the training time.</a:t>
+              <a:t> Training converges significantly more slowly compared to Adam.</a:t>
             </a:r>
           </a:p>
           <a:p>
@@ -13701,10 +13630,10 @@
       </p:sp>
       <p:pic>
         <p:nvPicPr>
-          <p:cNvPr id="3" name="Picture 2">
+          <p:cNvPr id="6" name="Picture 5">
             <a:extLst>
               <a:ext uri="{FF2B5EF4-FFF2-40B4-BE49-F238E27FC236}">
-                <a16:creationId xmlns:a16="http://schemas.microsoft.com/office/drawing/2014/main" id="{28DE3E3F-6DE9-96D8-0BAC-C75E59461094}"/>
+                <a16:creationId xmlns:a16="http://schemas.microsoft.com/office/drawing/2014/main" id="{5748D527-448E-1DD9-CD4C-F5F35259880C}"/>
               </a:ext>
             </a:extLst>
           </p:cNvPr>
@@ -13721,8 +13650,8 @@
         </p:blipFill>
         <p:spPr>
           <a:xfrm>
-            <a:off x="630936" y="2441858"/>
-            <a:ext cx="10917936" cy="3657507"/>
+            <a:off x="455708" y="2514600"/>
+            <a:ext cx="11093163" cy="3766142"/>
           </a:xfrm>
           <a:prstGeom prst="rect">
             <a:avLst/>
@@ -14110,13 +14039,13 @@
         </p:nvSpPr>
         <p:spPr>
           <a:xfrm>
-            <a:off x="4654295" y="502920"/>
-            <a:ext cx="6894576" cy="1463040"/>
+            <a:off x="4654295" y="502919"/>
+            <a:ext cx="6894576" cy="1711643"/>
           </a:xfrm>
         </p:spPr>
         <p:txBody>
           <a:bodyPr anchor="ctr">
-            <a:normAutofit/>
+            <a:normAutofit fontScale="62500" lnSpcReduction="20000"/>
           </a:bodyPr>
           <a:lstStyle/>
           <a:p>
@@ -14127,8 +14056,7 @@
               <a:spcAft>
                 <a:spcPts val="600"/>
               </a:spcAft>
-              <a:buFontTx/>
-              <a:buChar char="•"/>
+              <a:buNone/>
             </a:pPr>
             <a:r>
               <a:rPr kumimoji="0" lang="en-US" altLang="en-US" sz="1500" b="1" i="0" u="none" strike="noStrike" cap="none" normalizeH="0" baseline="0" dirty="0">
@@ -14148,27 +14076,7 @@
                 <a:effectLst/>
                 <a:latin typeface="Arial" panose="020B0604020202020204" pitchFamily="34" charset="0"/>
               </a:rPr>
-              <a:t> Achieved </a:t>
-            </a:r>
-            <a:r>
-              <a:rPr kumimoji="0" lang="en-US" altLang="en-US" sz="1500" b="1" i="0" u="none" strike="noStrike" cap="none" normalizeH="0" baseline="0" dirty="0">
-                <a:ln>
-                  <a:noFill/>
-                </a:ln>
-                <a:effectLst/>
-                <a:latin typeface="Arial" panose="020B0604020202020204" pitchFamily="34" charset="0"/>
-              </a:rPr>
-              <a:t>92.2% Accuracy</a:t>
-            </a:r>
-            <a:r>
-              <a:rPr kumimoji="0" lang="en-US" altLang="en-US" sz="1500" b="0" i="0" u="none" strike="noStrike" cap="none" normalizeH="0" baseline="0" dirty="0">
-                <a:ln>
-                  <a:noFill/>
-                </a:ln>
-                <a:effectLst/>
-                <a:latin typeface="Arial" panose="020B0604020202020204" pitchFamily="34" charset="0"/>
-              </a:rPr>
-              <a:t> with a smooth training curve.</a:t>
+              <a:t> Achieved ~85.9% Peak Accuracy</a:t>
             </a:r>
           </a:p>
           <a:p>
@@ -14179,8 +14087,7 @@
               <a:spcAft>
                 <a:spcPts val="600"/>
               </a:spcAft>
-              <a:buFontTx/>
-              <a:buChar char="•"/>
+              <a:buNone/>
             </a:pPr>
             <a:r>
               <a:rPr kumimoji="0" lang="en-US" altLang="en-US" sz="1500" b="1" i="0" u="none" strike="noStrike" cap="none" normalizeH="0" baseline="0" dirty="0">
@@ -14190,37 +14097,7 @@
                 <a:effectLst/>
                 <a:latin typeface="Arial" panose="020B0604020202020204" pitchFamily="34" charset="0"/>
               </a:rPr>
-              <a:t>Dynamics:</a:t>
-            </a:r>
-            <a:r>
-              <a:rPr kumimoji="0" lang="en-US" altLang="en-US" sz="1500" b="0" i="0" u="none" strike="noStrike" cap="none" normalizeH="0" baseline="0" dirty="0">
-                <a:ln>
-                  <a:noFill/>
-                </a:ln>
-                <a:effectLst/>
-                <a:latin typeface="Arial" panose="020B0604020202020204" pitchFamily="34" charset="0"/>
-              </a:rPr>
-              <a:t> The "Tortoise" approach. Convergence was slower than Adam, but the </a:t>
-            </a:r>
-            <a:r>
-              <a:rPr kumimoji="0" lang="en-US" altLang="en-US" sz="1500" b="1" i="0" u="none" strike="noStrike" cap="none" normalizeH="0" baseline="0" dirty="0">
-                <a:ln>
-                  <a:noFill/>
-                </a:ln>
-                <a:effectLst/>
-                <a:latin typeface="Arial" panose="020B0604020202020204" pitchFamily="34" charset="0"/>
-              </a:rPr>
-              <a:t>validation loss decreased monotonically</a:t>
-            </a:r>
-            <a:r>
-              <a:rPr kumimoji="0" lang="en-US" altLang="en-US" sz="1500" b="0" i="0" u="none" strike="noStrike" cap="none" normalizeH="0" baseline="0" dirty="0">
-                <a:ln>
-                  <a:noFill/>
-                </a:ln>
-                <a:effectLst/>
-                <a:latin typeface="Arial" panose="020B0604020202020204" pitchFamily="34" charset="0"/>
-              </a:rPr>
-              <a:t> (no instability).</a:t>
+              <a:t>Observations:</a:t>
             </a:r>
           </a:p>
           <a:p>
@@ -14231,8 +14108,70 @@
               <a:spcAft>
                 <a:spcPts val="600"/>
               </a:spcAft>
-              <a:buFontTx/>
-              <a:buChar char="•"/>
+              <a:buNone/>
+            </a:pPr>
+            <a:r>
+              <a:rPr kumimoji="0" lang="en-US" altLang="en-US" sz="1500" i="0" u="none" strike="noStrike" cap="none" normalizeH="0" baseline="0" dirty="0">
+                <a:ln>
+                  <a:noFill/>
+                </a:ln>
+                <a:effectLst/>
+                <a:latin typeface="Arial" panose="020B0604020202020204" pitchFamily="34" charset="0"/>
+              </a:rPr>
+              <a:t> - Reducing the learning rate resulted in slower but more stable convergence. Training loss decreased smoothly across epochs, and training accuracy improved steadily.</a:t>
+            </a:r>
+          </a:p>
+          <a:p>
+            <a:pPr marL="0" lvl="0" indent="0" eaLnBrk="0" fontAlgn="base" hangingPunct="0">
+              <a:spcBef>
+                <a:spcPct val="0"/>
+              </a:spcBef>
+              <a:spcAft>
+                <a:spcPts val="600"/>
+              </a:spcAft>
+              <a:buNone/>
+            </a:pPr>
+            <a:r>
+              <a:rPr kumimoji="0" lang="en-US" altLang="en-US" sz="1500" i="0" u="none" strike="noStrike" cap="none" normalizeH="0" baseline="0" dirty="0">
+                <a:ln>
+                  <a:noFill/>
+                </a:ln>
+                <a:effectLst/>
+                <a:latin typeface="Arial" panose="020B0604020202020204" pitchFamily="34" charset="0"/>
+              </a:rPr>
+              <a:t>- Validation performance also improved gradually, with reduced fluctuations compared to the higher learning rate setting.</a:t>
+            </a:r>
+          </a:p>
+          <a:p>
+            <a:pPr marL="0" lvl="0" indent="0" eaLnBrk="0" fontAlgn="base" hangingPunct="0">
+              <a:spcBef>
+                <a:spcPct val="0"/>
+              </a:spcBef>
+              <a:spcAft>
+                <a:spcPts val="600"/>
+              </a:spcAft>
+              <a:buNone/>
+            </a:pPr>
+            <a:r>
+              <a:rPr kumimoji="0" lang="en-US" altLang="en-US" sz="1500" i="0" u="none" strike="noStrike" cap="none" normalizeH="0" baseline="0" dirty="0">
+                <a:ln>
+                  <a:noFill/>
+                </a:ln>
+                <a:effectLst/>
+                <a:latin typeface="Arial" panose="020B0604020202020204" pitchFamily="34" charset="0"/>
+              </a:rPr>
+              <a:t>- the final validation accuracy was lower than that achieved with the baseline learning rate, and more epochs were required to reach peak performance.</a:t>
+            </a:r>
+          </a:p>
+          <a:p>
+            <a:pPr marL="0" lvl="0" indent="0" eaLnBrk="0" fontAlgn="base" hangingPunct="0">
+              <a:spcBef>
+                <a:spcPct val="0"/>
+              </a:spcBef>
+              <a:spcAft>
+                <a:spcPts val="600"/>
+              </a:spcAft>
+              <a:buNone/>
             </a:pPr>
             <a:r>
               <a:rPr kumimoji="0" lang="en-US" altLang="en-US" sz="1500" b="1" i="0" u="none" strike="noStrike" cap="none" normalizeH="0" baseline="0" dirty="0">
@@ -14242,47 +14181,59 @@
                 <a:effectLst/>
                 <a:latin typeface="Arial" panose="020B0604020202020204" pitchFamily="34" charset="0"/>
               </a:rPr>
-              <a:t>Key Win:</a:t>
-            </a:r>
-            <a:r>
-              <a:rPr kumimoji="0" lang="en-US" altLang="en-US" sz="1500" b="0" i="0" u="none" strike="noStrike" cap="none" normalizeH="0" baseline="0" dirty="0">
+              <a:t>Takeaway:</a:t>
+            </a:r>
+          </a:p>
+          <a:p>
+            <a:pPr marL="0" lvl="0" indent="0" eaLnBrk="0" fontAlgn="base" hangingPunct="0">
+              <a:spcBef>
+                <a:spcPct val="0"/>
+              </a:spcBef>
+              <a:spcAft>
+                <a:spcPts val="600"/>
+              </a:spcAft>
+              <a:buNone/>
+            </a:pPr>
+            <a:r>
+              <a:rPr kumimoji="0" lang="en-US" altLang="en-US" sz="1500" i="0" u="none" strike="noStrike" cap="none" normalizeH="0" baseline="0" dirty="0">
                 <a:ln>
                   <a:noFill/>
                 </a:ln>
                 <a:effectLst/>
                 <a:latin typeface="Arial" panose="020B0604020202020204" pitchFamily="34" charset="0"/>
               </a:rPr>
-              <a:t> </a:t>
-            </a:r>
-            <a:r>
-              <a:rPr kumimoji="0" lang="en-US" altLang="en-US" sz="1500" b="1" i="0" u="none" strike="noStrike" cap="none" normalizeH="0" baseline="0" dirty="0">
+              <a:t>While a lower learning rate improved training stability, it also slowed convergence and limited the final validation performance.</a:t>
+            </a:r>
+          </a:p>
+          <a:p>
+            <a:pPr marL="0" lvl="0" indent="0" eaLnBrk="0" fontAlgn="base" hangingPunct="0">
+              <a:spcBef>
+                <a:spcPct val="0"/>
+              </a:spcBef>
+              <a:spcAft>
+                <a:spcPts val="600"/>
+              </a:spcAft>
+              <a:buNone/>
+            </a:pPr>
+            <a:r>
+              <a:rPr kumimoji="0" lang="en-US" altLang="en-US" sz="1500" i="0" u="none" strike="noStrike" cap="none" normalizeH="0" baseline="0" dirty="0">
                 <a:ln>
                   <a:noFill/>
                 </a:ln>
                 <a:effectLst/>
                 <a:latin typeface="Arial" panose="020B0604020202020204" pitchFamily="34" charset="0"/>
               </a:rPr>
-              <a:t>Superior Generalization</a:t>
-            </a:r>
-            <a:r>
-              <a:rPr kumimoji="0" lang="en-US" altLang="en-US" sz="1500" b="0" i="0" u="none" strike="noStrike" cap="none" normalizeH="0" baseline="0" dirty="0">
-                <a:ln>
-                  <a:noFill/>
-                </a:ln>
-                <a:effectLst/>
-                <a:latin typeface="Arial" panose="020B0604020202020204" pitchFamily="34" charset="0"/>
-              </a:rPr>
-              <a:t>. The model showed almost zero overfitting, with validation performance tracking training performance perfectly.</a:t>
+              <a:t>For this dataset and architecture, a learning rate of 1e-3 provided a better trade-off between convergence speed and validation accuracy and was therefore selected for subsequent experiments.</a:t>
             </a:r>
           </a:p>
         </p:txBody>
       </p:sp>
       <p:pic>
         <p:nvPicPr>
-          <p:cNvPr id="3" name="Picture 2">
+          <p:cNvPr id="6" name="Picture 5">
             <a:extLst>
               <a:ext uri="{FF2B5EF4-FFF2-40B4-BE49-F238E27FC236}">
-                <a16:creationId xmlns:a16="http://schemas.microsoft.com/office/drawing/2014/main" id="{34C44C9B-8E13-9409-88E8-59A07389991E}"/>
+                <a16:creationId xmlns:a16="http://schemas.microsoft.com/office/drawing/2014/main" id="{17B664E9-7F58-CBC4-EA46-B762153DC99F}"/>
               </a:ext>
             </a:extLst>
           </p:cNvPr>
@@ -14299,8 +14250,8 @@
         </p:blipFill>
         <p:spPr>
           <a:xfrm>
-            <a:off x="630936" y="2471225"/>
-            <a:ext cx="10917936" cy="3575623"/>
+            <a:off x="371422" y="2468880"/>
+            <a:ext cx="11177449" cy="3770490"/>
           </a:xfrm>
           <a:prstGeom prst="rect">
             <a:avLst/>
@@ -14697,7 +14648,7 @@
         </p:spPr>
         <p:txBody>
           <a:bodyPr anchor="ctr">
-            <a:normAutofit/>
+            <a:normAutofit fontScale="92500" lnSpcReduction="20000"/>
           </a:bodyPr>
           <a:lstStyle/>
           <a:p>
@@ -14708,8 +14659,7 @@
               <a:spcAft>
                 <a:spcPts val="600"/>
               </a:spcAft>
-              <a:buFontTx/>
-              <a:buChar char="•"/>
+              <a:buNone/>
             </a:pPr>
             <a:r>
               <a:rPr kumimoji="0" lang="en-US" altLang="en-US" sz="1200" b="1" i="0" u="none" strike="noStrike" cap="none" normalizeH="0" baseline="0" dirty="0">
@@ -14719,7 +14669,7 @@
                 <a:effectLst/>
                 <a:latin typeface="Google Sans Text"/>
               </a:rPr>
-              <a:t>Result:</a:t>
+              <a:t>Result: </a:t>
             </a:r>
             <a:r>
               <a:rPr kumimoji="0" lang="en-US" altLang="en-US" sz="1200" b="0" i="0" u="none" strike="noStrike" cap="none" normalizeH="0" baseline="0" dirty="0">
@@ -14729,27 +14679,7 @@
                 <a:effectLst/>
                 <a:latin typeface="Google Sans Text"/>
               </a:rPr>
-              <a:t> </a:t>
-            </a:r>
-            <a:r>
-              <a:rPr kumimoji="0" lang="en-US" altLang="en-US" sz="1200" b="1" i="0" u="none" strike="noStrike" cap="none" normalizeH="0" baseline="0" dirty="0">
-                <a:ln>
-                  <a:noFill/>
-                </a:ln>
-                <a:effectLst/>
-                <a:latin typeface="Google Sans Text"/>
-              </a:rPr>
-              <a:t>~90.6% Peak Accuracy</a:t>
-            </a:r>
-            <a:r>
-              <a:rPr kumimoji="0" lang="en-US" altLang="en-US" sz="1200" b="0" i="0" u="none" strike="noStrike" cap="none" normalizeH="0" baseline="0" dirty="0">
-                <a:ln>
-                  <a:noFill/>
-                </a:ln>
-                <a:effectLst/>
-                <a:latin typeface="Google Sans Text"/>
-              </a:rPr>
-              <a:t>. A major improvement over the Baseline (~80%).</a:t>
+              <a:t>Achieved ~72.9% Peak Accuracy.</a:t>
             </a:r>
           </a:p>
           <a:p>
@@ -14760,8 +14690,7 @@
               <a:spcAft>
                 <a:spcPts val="600"/>
               </a:spcAft>
-              <a:buFontTx/>
-              <a:buChar char="•"/>
+              <a:buNone/>
             </a:pPr>
             <a:r>
               <a:rPr kumimoji="0" lang="en-US" altLang="en-US" sz="1200" b="1" i="0" u="none" strike="noStrike" cap="none" normalizeH="0" baseline="0" dirty="0">
@@ -14779,15 +14708,8 @@
             </a:r>
             <a:r>
               <a:rPr lang="en-US" sz="1200" dirty="0"/>
-              <a:t>Larger batch size changed stability/convergence (summarize hist_bs32 vs hist_bs64).</a:t>
-            </a:r>
-            <a:endParaRPr kumimoji="0" lang="en-US" altLang="en-US" sz="1200" b="1" i="0" u="none" strike="noStrike" cap="none" normalizeH="0" baseline="0" dirty="0">
-              <a:ln>
-                <a:noFill/>
-              </a:ln>
-              <a:effectLst/>
-              <a:latin typeface="Google Sans Text"/>
-            </a:endParaRPr>
+              <a:t>Training progressed more slowly in the early epochs, with lower training accuracy compared to the baseline setting. Validation performance improved gradually but remained noticeably lower overall.</a:t>
+            </a:r>
           </a:p>
           <a:p>
             <a:pPr marL="0" lvl="0" indent="0" eaLnBrk="0" fontAlgn="base" hangingPunct="0">
@@ -14797,48 +14719,15 @@
               <a:spcAft>
                 <a:spcPts val="600"/>
               </a:spcAft>
-              <a:buFontTx/>
-              <a:buChar char="•"/>
+              <a:buNone/>
             </a:pPr>
             <a:r>
-              <a:rPr kumimoji="0" lang="en-US" altLang="en-US" sz="1200" b="1" i="0" u="none" strike="noStrike" cap="none" normalizeH="0" baseline="0" dirty="0">
-                <a:ln>
-                  <a:noFill/>
-                </a:ln>
-                <a:effectLst/>
-                <a:latin typeface="Google Sans Text"/>
-              </a:rPr>
-              <a:t>The Problem:</a:t>
-            </a:r>
-            <a:r>
-              <a:rPr kumimoji="0" lang="en-US" altLang="en-US" sz="1200" b="0" i="0" u="none" strike="noStrike" cap="none" normalizeH="0" baseline="0" dirty="0">
-                <a:ln>
-                  <a:noFill/>
-                </a:ln>
-                <a:effectLst/>
-                <a:latin typeface="Google Sans Text"/>
-              </a:rPr>
-              <a:t> </a:t>
-            </a:r>
-            <a:r>
-              <a:rPr kumimoji="0" lang="en-US" altLang="en-US" sz="1200" b="1" i="0" u="none" strike="noStrike" cap="none" normalizeH="0" baseline="0" dirty="0">
-                <a:ln>
-                  <a:noFill/>
-                </a:ln>
-                <a:effectLst/>
-                <a:latin typeface="Google Sans Text"/>
-              </a:rPr>
-              <a:t>High Volatility.</a:t>
-            </a:r>
-            <a:r>
-              <a:rPr kumimoji="0" lang="en-US" altLang="en-US" sz="1200" b="0" i="0" u="none" strike="noStrike" cap="none" normalizeH="0" baseline="0" dirty="0">
-                <a:ln>
-                  <a:noFill/>
-                </a:ln>
-                <a:effectLst/>
-                <a:latin typeface="Google Sans Text"/>
-              </a:rPr>
-              <a:t> The validation accuracy bounces wildly (e.g., 90% to 84% to 90%).</a:t>
+              <a:rPr lang="en-US" sz="1200" b="1" dirty="0"/>
+              <a:t>Takeaway</a:t>
+            </a:r>
+            <a:r>
+              <a:rPr lang="en-US" sz="1200" dirty="0"/>
+              <a:t>: </a:t>
             </a:r>
           </a:p>
           <a:p>
@@ -14849,16 +14738,34 @@
               <a:spcAft>
                 <a:spcPts val="600"/>
               </a:spcAft>
-              <a:buFontTx/>
-              <a:buChar char="•"/>
+              <a:buNone/>
             </a:pPr>
             <a:r>
-              <a:rPr lang="en-US" sz="1200" b="1" dirty="0"/>
-              <a:t>Takeaway</a:t>
-            </a:r>
-            <a:r>
               <a:rPr lang="en-US" sz="1200" dirty="0"/>
-              <a:t>: batch size affects gradient noise and generalization.</a:t>
+              <a:t>- Increasing the batch size to 64 reduced the overall validation performance and slowed convergence for this dataset.</a:t>
+            </a:r>
+          </a:p>
+          <a:p>
+            <a:pPr marL="0" lvl="0" indent="0" eaLnBrk="0" fontAlgn="base" hangingPunct="0">
+              <a:spcBef>
+                <a:spcPct val="0"/>
+              </a:spcBef>
+              <a:spcAft>
+                <a:spcPts val="600"/>
+              </a:spcAft>
+              <a:buNone/>
+            </a:pPr>
+            <a:r>
+              <a:rPr lang="en-US" sz="1200" dirty="0"/>
+              <a:t>- For </a:t>
+            </a:r>
+            <a:r>
+              <a:rPr lang="en-US" sz="1200" dirty="0" err="1"/>
+              <a:t>DeepCNN</a:t>
+            </a:r>
+            <a:r>
+              <a:rPr lang="en-US" sz="1200" dirty="0"/>
+              <a:t> + Adam with this dataset size, batch size 32 appears to provide a better trade-off between convergence speed and validation accuracy.</a:t>
             </a:r>
             <a:endParaRPr kumimoji="0" lang="en-US" altLang="en-US" sz="1200" b="0" i="0" u="none" strike="noStrike" cap="none" normalizeH="0" baseline="0" dirty="0">
               <a:ln>
@@ -14872,10 +14779,10 @@
       </p:sp>
       <p:pic>
         <p:nvPicPr>
-          <p:cNvPr id="13" name="Picture 12">
+          <p:cNvPr id="3" name="Picture 2">
             <a:extLst>
               <a:ext uri="{FF2B5EF4-FFF2-40B4-BE49-F238E27FC236}">
-                <a16:creationId xmlns:a16="http://schemas.microsoft.com/office/drawing/2014/main" id="{00101494-24A5-2ABE-CB77-EF73BEE37F4A}"/>
+                <a16:creationId xmlns:a16="http://schemas.microsoft.com/office/drawing/2014/main" id="{62D433EE-5531-FE1F-76BF-2EFFDE139F30}"/>
               </a:ext>
             </a:extLst>
           </p:cNvPr>
@@ -14892,8 +14799,8 @@
         </p:blipFill>
         <p:spPr>
           <a:xfrm>
-            <a:off x="630936" y="2496447"/>
-            <a:ext cx="10917936" cy="3548329"/>
+            <a:off x="431357" y="2231582"/>
+            <a:ext cx="11329285" cy="3917089"/>
           </a:xfrm>
           <a:prstGeom prst="rect">
             <a:avLst/>
@@ -15398,7 +15305,7 @@
                 <a:effectLst/>
                 <a:latin typeface="Google Sans Text"/>
               </a:rPr>
-              <a:t> The loss curve is "jagged" and unpredictable (e.g., Val Loss 4.6 to 1.4 to 2.1).</a:t>
+              <a:t> The loss curve is "jagged" and unpredictable (e.g., Val Loss jumps from 2.4 to 5.0).</a:t>
             </a:r>
           </a:p>
           <a:p>
@@ -15462,36 +15369,6 @@
           </a:p>
         </p:txBody>
       </p:sp>
-      <p:pic>
-        <p:nvPicPr>
-          <p:cNvPr id="6" name="Picture 5">
-            <a:extLst>
-              <a:ext uri="{FF2B5EF4-FFF2-40B4-BE49-F238E27FC236}">
-                <a16:creationId xmlns:a16="http://schemas.microsoft.com/office/drawing/2014/main" id="{521A36F4-2CDC-A123-93C6-FE6952AA9281}"/>
-              </a:ext>
-            </a:extLst>
-          </p:cNvPr>
-          <p:cNvPicPr>
-            <a:picLocks noChangeAspect="1"/>
-          </p:cNvPicPr>
-          <p:nvPr/>
-        </p:nvPicPr>
-        <p:blipFill>
-          <a:blip r:embed="rId2"/>
-          <a:stretch>
-            <a:fillRect/>
-          </a:stretch>
-        </p:blipFill>
-        <p:spPr>
-          <a:xfrm>
-            <a:off x="630936" y="2496447"/>
-            <a:ext cx="10917936" cy="3548329"/>
-          </a:xfrm>
-          <a:prstGeom prst="rect">
-            <a:avLst/>
-          </a:prstGeom>
-        </p:spPr>
-      </p:pic>
       <p:sp>
         <p:nvSpPr>
           <p:cNvPr id="3" name="Subtitle 2">
@@ -15694,6 +15571,36 @@
           </a:p>
         </p:txBody>
       </p:sp>
+      <p:pic>
+        <p:nvPicPr>
+          <p:cNvPr id="7" name="Picture 6">
+            <a:extLst>
+              <a:ext uri="{FF2B5EF4-FFF2-40B4-BE49-F238E27FC236}">
+                <a16:creationId xmlns:a16="http://schemas.microsoft.com/office/drawing/2014/main" id="{DD316746-4B60-8899-8B9A-06BB87BF4DDA}"/>
+              </a:ext>
+            </a:extLst>
+          </p:cNvPr>
+          <p:cNvPicPr>
+            <a:picLocks noChangeAspect="1"/>
+          </p:cNvPicPr>
+          <p:nvPr/>
+        </p:nvPicPr>
+        <p:blipFill>
+          <a:blip r:embed="rId2"/>
+          <a:stretch>
+            <a:fillRect/>
+          </a:stretch>
+        </p:blipFill>
+        <p:spPr>
+          <a:xfrm>
+            <a:off x="511940" y="2526394"/>
+            <a:ext cx="11168119" cy="3771171"/>
+          </a:xfrm>
+          <a:prstGeom prst="rect">
+            <a:avLst/>
+          </a:prstGeom>
+        </p:spPr>
+      </p:pic>
     </p:spTree>
     <p:extLst>
       <p:ext uri="{BB962C8B-B14F-4D97-AF65-F5344CB8AC3E}">

--- a/final_presentation.pptx
+++ b/final_presentation.pptx
@@ -10507,18 +10507,15 @@
             </a:r>
           </a:p>
           <a:p>
-            <a:pPr marL="457200" marR="0" lvl="1" indent="0" defTabSz="914400" rtl="0" eaLnBrk="0" fontAlgn="base" latinLnBrk="0" hangingPunct="0">
+            <a:pPr marL="457200" lvl="1" indent="0" eaLnBrk="0" fontAlgn="base" hangingPunct="0">
               <a:spcBef>
                 <a:spcPct val="0"/>
               </a:spcBef>
               <a:spcAft>
                 <a:spcPct val="0"/>
               </a:spcAft>
-              <a:buClrTx/>
-              <a:buSzTx/>
               <a:buFontTx/>
               <a:buChar char="•"/>
-              <a:tabLst/>
             </a:pPr>
             <a:r>
               <a:rPr kumimoji="0" lang="en-US" altLang="en-US" sz="1900" b="1" i="0" u="none" strike="noStrike" cap="none" normalizeH="0" baseline="0" dirty="0">
@@ -10536,8 +10533,18 @@
                 </a:ln>
                 <a:effectLst/>
               </a:rPr>
-              <a:t> Adding Batch Normalization (Experiment 5) immediately smoothed the loss curve and allowed the deeper network to train effectively, raising accuracy from ~82% to ~90%.</a:t>
-            </a:r>
+              <a:t> </a:t>
+            </a:r>
+            <a:r>
+              <a:rPr lang="en-US" sz="2000" dirty="0"/>
+              <a:t>Adding Batch Normalization accelerated learning and raised peak accuracy to ~92%, but left validation highly volatile.</a:t>
+            </a:r>
+            <a:endParaRPr kumimoji="0" lang="en-US" altLang="en-US" sz="1900" b="0" i="0" u="none" strike="noStrike" cap="none" normalizeH="0" baseline="0" dirty="0">
+              <a:ln>
+                <a:noFill/>
+              </a:ln>
+              <a:effectLst/>
+            </a:endParaRPr>
           </a:p>
           <a:p>
             <a:pPr marL="0" marR="0" lvl="0" indent="0" defTabSz="914400" rtl="0" eaLnBrk="0" fontAlgn="base" latinLnBrk="0" hangingPunct="0">
@@ -10570,18 +10577,15 @@
             </a:endParaRPr>
           </a:p>
           <a:p>
-            <a:pPr marL="457200" marR="0" lvl="1" indent="0" defTabSz="914400" rtl="0" eaLnBrk="0" fontAlgn="base" latinLnBrk="0" hangingPunct="0">
+            <a:pPr marL="457200" lvl="1" indent="0" eaLnBrk="0" fontAlgn="base" hangingPunct="0">
               <a:spcBef>
                 <a:spcPct val="0"/>
               </a:spcBef>
               <a:spcAft>
                 <a:spcPct val="0"/>
               </a:spcAft>
-              <a:buClrTx/>
-              <a:buSzTx/>
               <a:buFontTx/>
               <a:buChar char="•"/>
-              <a:tabLst/>
             </a:pPr>
             <a:r>
               <a:rPr kumimoji="0" lang="en-US" altLang="en-US" sz="1900" b="1" i="0" u="none" strike="noStrike" cap="none" normalizeH="0" baseline="0" dirty="0">
@@ -10599,40 +10603,37 @@
                 </a:ln>
                 <a:effectLst/>
               </a:rPr>
-              <a:t> The </a:t>
-            </a:r>
-            <a:r>
-              <a:rPr kumimoji="0" lang="en-US" altLang="en-US" sz="1900" b="0" i="0" u="none" strike="noStrike" cap="none" normalizeH="0" baseline="0" dirty="0" err="1">
-                <a:ln>
-                  <a:noFill/>
-                </a:ln>
-                <a:effectLst/>
-              </a:rPr>
+              <a:t> </a:t>
+            </a:r>
+            <a:r>
+              <a:rPr lang="en-US" sz="2000" dirty="0"/>
+              <a:t>The </a:t>
+            </a:r>
+            <a:r>
+              <a:rPr lang="en-US" sz="2000" dirty="0" err="1"/>
               <a:t>DeepCNN</a:t>
             </a:r>
             <a:r>
-              <a:rPr kumimoji="0" lang="en-US" altLang="en-US" sz="1900" b="0" i="0" u="none" strike="noStrike" cap="none" normalizeH="0" baseline="0" dirty="0">
-                <a:ln>
-                  <a:noFill/>
-                </a:ln>
-                <a:effectLst/>
-              </a:rPr>
-              <a:t> with BN alone (Experiment 5) showed signs of overfitting (high variance).</a:t>
-            </a:r>
-          </a:p>
-          <a:p>
-            <a:pPr marL="457200" marR="0" lvl="1" indent="0" defTabSz="914400" rtl="0" eaLnBrk="0" fontAlgn="base" latinLnBrk="0" hangingPunct="0">
+              <a:rPr lang="en-US" sz="2000" dirty="0"/>
+              <a:t> with BN alone showed signs of overfitting and extreme validation instability</a:t>
+            </a:r>
+            <a:endParaRPr kumimoji="0" lang="en-US" altLang="en-US" sz="1900" b="0" i="0" u="none" strike="noStrike" cap="none" normalizeH="0" baseline="0" dirty="0">
+              <a:ln>
+                <a:noFill/>
+              </a:ln>
+              <a:effectLst/>
+            </a:endParaRPr>
+          </a:p>
+          <a:p>
+            <a:pPr marL="457200" lvl="1" indent="0" eaLnBrk="0" fontAlgn="base" hangingPunct="0">
               <a:spcBef>
                 <a:spcPct val="0"/>
               </a:spcBef>
               <a:spcAft>
                 <a:spcPct val="0"/>
               </a:spcAft>
-              <a:buClrTx/>
-              <a:buSzTx/>
               <a:buFontTx/>
               <a:buChar char="•"/>
-              <a:tabLst/>
             </a:pPr>
             <a:r>
               <a:rPr kumimoji="0" lang="en-US" altLang="en-US" sz="1900" b="1" i="0" u="none" strike="noStrike" cap="none" normalizeH="0" baseline="0" dirty="0">
@@ -10650,8 +10651,22 @@
                 </a:ln>
                 <a:effectLst/>
               </a:rPr>
-              <a:t> Adding Dropout (Experiment 3) successfully closed the generalization gap, bringing the validation accuracy to its peak for custom models (~95%).</a:t>
-            </a:r>
+              <a:t> </a:t>
+            </a:r>
+            <a:r>
+              <a:rPr lang="en-US" sz="2000" dirty="0" err="1"/>
+              <a:t>dding</a:t>
+            </a:r>
+            <a:r>
+              <a:rPr lang="en-US" sz="2000"/>
+              <a:t> Dropout (Experiment R1) successfully smoothed the validation curve and closed the generalization gap.</a:t>
+            </a:r>
+            <a:endParaRPr kumimoji="0" lang="en-US" altLang="en-US" sz="1900" b="0" i="0" u="none" strike="noStrike" cap="none" normalizeH="0" baseline="0" dirty="0">
+              <a:ln>
+                <a:noFill/>
+              </a:ln>
+              <a:effectLst/>
+            </a:endParaRPr>
           </a:p>
           <a:p>
             <a:pPr marL="0" marR="0" lvl="0" indent="0" defTabSz="914400" rtl="0" eaLnBrk="0" fontAlgn="base" latinLnBrk="0" hangingPunct="0">
